--- a/course-package/slides/00-course-orientation.pptx
+++ b/course-package/slides/00-course-orientation.pptx
@@ -1001,7 +1001,7 @@
           <a:lstStyle/>
           <a:p>
             <a:r>
-              <a:t>八份教材不用逐一念，指著螢幕帶過主題範圍就好。強調『這些是可下載的檔案，不是只能線上看』。</a:t>
+              <a:t>七份教材不用逐一念，指著螢幕帶過主題範圍就好。強調『這些是可下載的檔案，不是只能線上看』。網站上另有一份 Embabel 選修附錄，不列在這裡，不用主動提。</a:t>
             </a:r>
           </a:p>
         </p:txBody>
@@ -8103,7 +8103,7 @@
                 <a:ea typeface="Microsoft JhengHei"/>
                 <a:cs typeface="Microsoft JhengHei"/>
               </a:rPr>
-              <a:t>八份下載教材</a:t>
+              <a:t>七份下載教材</a:t>
             </a:r>
           </a:p>
         </p:txBody>
@@ -8144,7 +8144,7 @@
                 <a:ea typeface="Microsoft JhengHei"/>
                 <a:cs typeface="Microsoft JhengHei"/>
               </a:rPr>
-              <a:t>開發環境安裝指引 · REST API 命名規範 · Docker PostgreSQL 與 pgvector 設定 · pgvector 向量檢索指令 · JWT 架構與認證流程 · React 與 Axios 前後端整合 · Spring AI 與 Tool Calling 架構 · Embabel 黑板機制與 GOAP</a:t>
+              <a:t>開發環境安裝指引 · REST API 命名規範 · Docker PostgreSQL 與 pgvector 設定 · pgvector 向量檢索指令 · JWT 架構與認證流程 · React 與 Axios 前後端整合 · Spring AI 與 Tool Calling 架構</a:t>
             </a:r>
           </a:p>
         </p:txBody>
